--- a/materials/pdf/original/DS12_Folien_Grammatik-trifft-Automat.pptx
+++ b/materials/pdf/original/DS12_Folien_Grammatik-trifft-Automat.pptx
@@ -126,12 +126,12 @@
   <p:extLst>
     <p:ext uri="{521415D9-36F7-43E2-AB2F-B90AF26B5E84}">
       <p14:sectionLst xmlns:p14="http://schemas.microsoft.com/office/powerpoint/2010/main">
-        <p14:section name="Start" id="{36f7e5f3-b960-7565-abc5-9f9a9749e8c3}">
+        <p14:section name="Start" id="{83e47ae3-7292-d9a8-0708-94e5c477425d}">
           <p14:sldIdLst>
             <p14:sldId id="256"/>
           </p14:sldIdLst>
         </p14:section>
-        <p14:section name="Einstieg" id="{8d279383-3b3a-ccd5-da3b-43300763a172}">
+        <p14:section name="Einstieg" id="{014b7c91-4113-7ab4-9444-6e0ef1d6a6d3}">
           <p14:sldIdLst>
             <p14:sldId id="257"/>
             <p14:sldId id="258"/>
@@ -139,7 +139,7 @@
             <p14:sldId id="260"/>
           </p14:sldIdLst>
         </p14:section>
-        <p14:section name="Erarbeitung" id="{08ffc445-b89b-9d42-112f-7cf5051c3f68}">
+        <p14:section name="Erarbeitung" id="{7fa4dd12-d919-7e12-40b8-d12367011721}">
           <p14:sldIdLst>
             <p14:sldId id="261"/>
             <p14:sldId id="262"/>
@@ -152,20 +152,20 @@
             <p14:sldId id="269"/>
           </p14:sldIdLst>
         </p14:section>
-        <p14:section name="Übung" id="{3dbc6b1a-1fe9-b2f8-db30-7bece19b473f}">
+        <p14:section name="Übung" id="{50bbffb5-baa2-6081-d89b-439910a2b4ce}">
           <p14:sldIdLst>
             <p14:sldId id="270"/>
             <p14:sldId id="271"/>
             <p14:sldId id="272"/>
           </p14:sldIdLst>
         </p14:section>
-        <p14:section name="Sicherung" id="{701bea0a-c999-4af6-6413-692335e3879a}">
+        <p14:section name="Sicherung" id="{26db0232-b79d-6ff9-b9c4-f9b726df1e46}">
           <p14:sldIdLst>
             <p14:sldId id="273"/>
             <p14:sldId id="274"/>
           </p14:sldIdLst>
         </p14:section>
-        <p14:section name="Abschluss" id="{99c381e7-7ce5-c82c-9c29-0afb94f57a21}">
+        <p14:section name="Abschluss" id="{5e6cfac5-8959-2bd8-e097-a5c08db7e10a}">
           <p14:sldIdLst>
             <p14:sldId id="275"/>
           </p14:sldIdLst>
@@ -838,7 +838,7 @@
           <a:p>
             <a:r>
               <a:rPr lang="en-US" dirty="0"/>
-              <a:t>NEA akzeptiert, wenn es mindestens einen Weg in einen Endzustand gibt (ausführlich: Bonus-Level 8, M06).</a:t>
+              <a:t>[NUR LEHRKRAFT] NEA akzeptiert, wenn es mindestens einen Weg in einen Endzustand gibt (ausführlich: Bonus-Level 8, M06).</a:t>
             </a:r>
             <a:endParaRPr lang="en-US" dirty="0"/>
           </a:p>
@@ -926,7 +926,7 @@
           <a:p>
             <a:r>
               <a:rPr lang="en-US" dirty="0"/>
-              <a:t>Teilmengen: S0 = {S}, S1 = {C}, S2 = {B}, S3 = {A}, S4 = {T}, S5 = {S, Z}. Warum darf man S0 nicht einfach zum Endzustand machen? (Dann würde das leere Wort akzeptiert.)</a:t>
+              <a:t>[NUR LEHRKRAFT] Teilmengen: S0 = {S}, S1 = {C}, S2 = {B}, S3 = {A}, S4 = {T}, S5 = {S, Z}. Warum darf man S0 nicht einfach zum Endzustand machen? (Dann würde das leere Wort akzeptiert.)</a:t>
             </a:r>
             <a:endParaRPr lang="en-US" dirty="0"/>
           </a:p>

--- a/materials/pdf/original/DS12_Folien_Grammatik-trifft-Automat.pptx
+++ b/materials/pdf/original/DS12_Folien_Grammatik-trifft-Automat.pptx
@@ -126,12 +126,12 @@
   <p:extLst>
     <p:ext uri="{521415D9-36F7-43E2-AB2F-B90AF26B5E84}">
       <p14:sectionLst xmlns:p14="http://schemas.microsoft.com/office/powerpoint/2010/main">
-        <p14:section name="Start" id="{83e47ae3-7292-d9a8-0708-94e5c477425d}">
+        <p14:section name="Start" id="{67cf0ba3-4161-0a74-d408-dc186c4062c6}">
           <p14:sldIdLst>
             <p14:sldId id="256"/>
           </p14:sldIdLst>
         </p14:section>
-        <p14:section name="Einstieg" id="{014b7c91-4113-7ab4-9444-6e0ef1d6a6d3}">
+        <p14:section name="Einstieg" id="{e51adc42-8af3-5749-8612-6528297890e4}">
           <p14:sldIdLst>
             <p14:sldId id="257"/>
             <p14:sldId id="258"/>
@@ -139,7 +139,7 @@
             <p14:sldId id="260"/>
           </p14:sldIdLst>
         </p14:section>
-        <p14:section name="Erarbeitung" id="{7fa4dd12-d919-7e12-40b8-d12367011721}">
+        <p14:section name="Erarbeitung" id="{7847c94e-c33e-96df-3aa2-6fb3bcec3b00}">
           <p14:sldIdLst>
             <p14:sldId id="261"/>
             <p14:sldId id="262"/>
@@ -152,20 +152,20 @@
             <p14:sldId id="269"/>
           </p14:sldIdLst>
         </p14:section>
-        <p14:section name="Übung" id="{50bbffb5-baa2-6081-d89b-439910a2b4ce}">
+        <p14:section name="Übung" id="{196e6ad7-c23c-159f-bb4b-f531f41d0d1c}">
           <p14:sldIdLst>
             <p14:sldId id="270"/>
             <p14:sldId id="271"/>
             <p14:sldId id="272"/>
           </p14:sldIdLst>
         </p14:section>
-        <p14:section name="Sicherung" id="{26db0232-b79d-6ff9-b9c4-f9b726df1e46}">
+        <p14:section name="Sicherung" id="{dc8554db-858f-175a-841c-c8fe0a5e6d5e}">
           <p14:sldIdLst>
             <p14:sldId id="273"/>
             <p14:sldId id="274"/>
           </p14:sldIdLst>
         </p14:section>
-        <p14:section name="Abschluss" id="{5e6cfac5-8959-2bd8-e097-a5c08db7e10a}">
+        <p14:section name="Abschluss" id="{59424684-f74a-03be-2d1e-089a743988f1}">
           <p14:sldIdLst>
             <p14:sldId id="275"/>
           </p14:sldIdLst>
@@ -2573,6 +2573,45 @@
       </p:sp>
       <p:sp>
         <p:nvSpPr>
+          <p:cNvPr id="4" name="Text 1"/>
+          <p:cNvSpPr/>
+          <p:nvPr/>
+        </p:nvSpPr>
+        <p:spPr>
+          <a:xfrm>
+            <a:off x="7985455" y="6473952"/>
+            <a:ext cx="2926080" cy="274320"/>
+          </a:xfrm>
+          <a:prstGeom prst="rect">
+            <a:avLst/>
+          </a:prstGeom>
+          <a:noFill/>
+          <a:ln/>
+        </p:spPr>
+        <p:txBody>
+          <a:bodyPr wrap="square" lIns="0" tIns="0" rIns="0" bIns="0" rtlCol="0" anchor="ctr"/>
+          <a:lstStyle/>
+          <a:p>
+            <a:pPr algn="r" indent="0" marL="0">
+              <a:buNone/>
+            </a:pPr>
+            <a:r>
+              <a:rPr lang="en-US" sz="1100" dirty="0">
+                <a:solidFill>
+                  <a:srgbClr val="5B6770"/>
+                </a:solidFill>
+                <a:latin typeface="Calibri" pitchFamily="34" charset="0"/>
+                <a:ea typeface="Calibri" pitchFamily="34" charset="-122"/>
+                <a:cs typeface="Calibri" pitchFamily="34" charset="-120"/>
+              </a:rPr>
+              <a:t>CC BY-SA 4.0 · Frank Juchim</a:t>
+            </a:r>
+            <a:endParaRPr lang="en-US" sz="1100" dirty="0"/>
+          </a:p>
+        </p:txBody>
+      </p:sp>
+      <p:sp>
+        <p:nvSpPr>
           <p:cNvPr id="25" name="Slide Number Placeholder 0"/>
           <p:cNvSpPr>
             <a:spLocks noGrp="1"/>
@@ -2724,6 +2763,45 @@
                 <a:cs typeface="Calibri" pitchFamily="34" charset="-120"/>
               </a:rPr>
               <a:t>Level 12 · Welt C · Formale Sprachen · nur eA (Leistungskurs)</a:t>
+            </a:r>
+            <a:endParaRPr lang="en-US" sz="1100" dirty="0"/>
+          </a:p>
+        </p:txBody>
+      </p:sp>
+      <p:sp>
+        <p:nvSpPr>
+          <p:cNvPr id="4" name="Text 1"/>
+          <p:cNvSpPr/>
+          <p:nvPr/>
+        </p:nvSpPr>
+        <p:spPr>
+          <a:xfrm>
+            <a:off x="7985455" y="6473952"/>
+            <a:ext cx="2926080" cy="274320"/>
+          </a:xfrm>
+          <a:prstGeom prst="rect">
+            <a:avLst/>
+          </a:prstGeom>
+          <a:noFill/>
+          <a:ln/>
+        </p:spPr>
+        <p:txBody>
+          <a:bodyPr wrap="square" lIns="0" tIns="0" rIns="0" bIns="0" rtlCol="0" anchor="ctr"/>
+          <a:lstStyle/>
+          <a:p>
+            <a:pPr algn="r" indent="0" marL="0">
+              <a:buNone/>
+            </a:pPr>
+            <a:r>
+              <a:rPr lang="en-US" sz="1100" dirty="0">
+                <a:solidFill>
+                  <a:srgbClr val="5B6770"/>
+                </a:solidFill>
+                <a:latin typeface="Calibri" pitchFamily="34" charset="0"/>
+                <a:ea typeface="Calibri" pitchFamily="34" charset="-122"/>
+                <a:cs typeface="Calibri" pitchFamily="34" charset="-120"/>
+              </a:rPr>
+              <a:t>CC BY-SA 4.0 · Frank Juchim</a:t>
             </a:r>
             <a:endParaRPr lang="en-US" sz="1100" dirty="0"/>
           </a:p>
